--- a/system-design-101/vi/lessons/sd-01-043/slides/sd-01-043.pptx
+++ b/system-design-101/vi/lessons/sd-01-043/slides/sd-01-043.pptx
@@ -31,12 +31,8 @@
       <p:regular r:id="rId17"/>
     </p:embeddedFont>
     <p:embeddedFont>
-      <p:font typeface="Roboto Mono"/>
-      <p:bold r:id="rId19"/>
-    </p:embeddedFont>
-    <p:embeddedFont>
       <p:font typeface="Be Vietnam Pro SemiBold"/>
-      <p:regular r:id="rId20"/>
+      <p:regular r:id="rId19"/>
     </p:embeddedFont>
   </p:embeddedFontLst>
   <p:defaultTextStyle>
@@ -2297,13 +2293,13 @@
               <a:buNone/>
             </a:pPr>
             <a:r>
-              <a:rPr lang="en-US" sz="3000" b="1" dirty="0" kern="0">
+              <a:rPr lang="en-US" sz="3000" b="1" dirty="0" spc="-5" kern="0">
                 <a:solidFill>
                   <a:srgbClr val="F3EEE3"/>
                 </a:solidFill>
-                <a:latin typeface="Roboto Mono" pitchFamily="34" charset="0"/>
-                <a:ea typeface="Roboto Mono" pitchFamily="34" charset="-122"/>
-                <a:cs typeface="Roboto Mono" pitchFamily="34" charset="-120"/>
+                <a:latin typeface="Be Vietnam Pro" pitchFamily="34" charset="0"/>
+                <a:ea typeface="Be Vietnam Pro" pitchFamily="34" charset="-122"/>
+                <a:cs typeface="Be Vietnam Pro" pitchFamily="34" charset="-120"/>
               </a:rPr>
               <a:t>stub.FindBook(id)</a:t>
             </a:r>
@@ -2959,13 +2955,13 @@
               <a:buNone/>
             </a:pPr>
             <a:r>
-              <a:rPr lang="en-US" sz="3900" b="1" dirty="0" spc="3" kern="0">
+              <a:rPr lang="en-US" sz="3900" b="1" dirty="0" spc="-7" kern="0">
                 <a:solidFill>
                   <a:srgbClr val="14161C"/>
                 </a:solidFill>
-                <a:latin typeface="Roboto Mono" pitchFamily="34" charset="0"/>
-                <a:ea typeface="Roboto Mono" pitchFamily="34" charset="-122"/>
-                <a:cs typeface="Roboto Mono" pitchFamily="34" charset="-120"/>
+                <a:latin typeface="Be Vietnam Pro" pitchFamily="34" charset="0"/>
+                <a:ea typeface="Be Vietnam Pro" pitchFamily="34" charset="-122"/>
+                <a:cs typeface="Be Vietnam Pro" pitchFamily="34" charset="-120"/>
               </a:rPr>
               <a:t>FindBook</a:t>
             </a:r>
@@ -3996,13 +3992,13 @@
               <a:buNone/>
             </a:pPr>
             <a:r>
-              <a:rPr lang="en-US" sz="3900" b="1" dirty="0" spc="3" kern="0">
+              <a:rPr lang="en-US" sz="3900" b="1" dirty="0" spc="-26" kern="0">
                 <a:solidFill>
                   <a:srgbClr val="E8472B"/>
                 </a:solidFill>
-                <a:latin typeface="Roboto Mono" pitchFamily="34" charset="0"/>
-                <a:ea typeface="Roboto Mono" pitchFamily="34" charset="-122"/>
-                <a:cs typeface="Roboto Mono" pitchFamily="34" charset="-120"/>
+                <a:latin typeface="Be Vietnam Pro" pitchFamily="34" charset="0"/>
+                <a:ea typeface="Be Vietnam Pro" pitchFamily="34" charset="-122"/>
+                <a:cs typeface="Be Vietnam Pro" pitchFamily="34" charset="-120"/>
               </a:rPr>
               <a:t>.proto</a:t>
             </a:r>
